--- a/docs/LEADER_DimASQP_Presentation.pptx
+++ b/docs/LEADER_DimASQP_Presentation.pptx
@@ -3361,6 +3361,41 @@
           </a:p>
         </p:txBody>
       </p:sp>
+      <p:sp>
+        <p:nvSpPr>
+          <p:cNvPr id="9" name="TextBox 8"/>
+          <p:cNvSpPr txBox="1"/>
+          <p:nvPr/>
+        </p:nvSpPr>
+        <p:spPr>
+          <a:xfrm>
+            <a:off x="73152" y="18288"/>
+            <a:ext cx="12042648" cy="274320"/>
+          </a:xfrm>
+          <a:prstGeom prst="rect">
+            <a:avLst/>
+          </a:prstGeom>
+          <a:noFill/>
+        </p:spPr>
+        <p:txBody>
+          <a:bodyPr wrap="none" lIns="36576" rIns="36576" tIns="0" bIns="0" anchor="ctr">
+            <a:spAutoFit/>
+          </a:bodyPr>
+          <a:lstStyle/>
+          <a:p>
+            <a:pPr algn="ctr"/>
+            <a:r>
+              <a:rPr sz="1000" b="1">
+                <a:solidFill>
+                  <a:srgbClr val="B91C1C"/>
+                </a:solidFill>
+                <a:latin typeface="Aptos"/>
+              </a:rPr>
+              <a:t>HISTORICAL DECK — superseded by the locked 2026-07-18 evidence; do not cite cross-split SOTA or universal KD claims</a:t>
+            </a:r>
+          </a:p>
+        </p:txBody>
+      </p:sp>
     </p:spTree>
   </p:cSld>
   <p:clrMapOvr>
@@ -4057,6 +4092,41 @@
           </a:p>
         </p:txBody>
       </p:sp>
+      <p:sp>
+        <p:nvSpPr>
+          <p:cNvPr id="12" name="TextBox 11"/>
+          <p:cNvSpPr txBox="1"/>
+          <p:nvPr/>
+        </p:nvSpPr>
+        <p:spPr>
+          <a:xfrm>
+            <a:off x="73152" y="18288"/>
+            <a:ext cx="12042648" cy="274320"/>
+          </a:xfrm>
+          <a:prstGeom prst="rect">
+            <a:avLst/>
+          </a:prstGeom>
+          <a:noFill/>
+        </p:spPr>
+        <p:txBody>
+          <a:bodyPr wrap="none" lIns="36576" rIns="36576" tIns="0" bIns="0" anchor="ctr">
+            <a:spAutoFit/>
+          </a:bodyPr>
+          <a:lstStyle/>
+          <a:p>
+            <a:pPr algn="ctr"/>
+            <a:r>
+              <a:rPr sz="1000" b="1">
+                <a:solidFill>
+                  <a:srgbClr val="B91C1C"/>
+                </a:solidFill>
+                <a:latin typeface="Aptos"/>
+              </a:rPr>
+              <a:t>HISTORICAL DECK — superseded by the locked 2026-07-18 evidence; do not cite cross-split SOTA or universal KD claims</a:t>
+            </a:r>
+          </a:p>
+        </p:txBody>
+      </p:sp>
     </p:spTree>
   </p:cSld>
   <p:clrMapOvr>
@@ -4420,6 +4490,41 @@
           </a:p>
         </p:txBody>
       </p:sp>
+      <p:sp>
+        <p:nvSpPr>
+          <p:cNvPr id="6" name="TextBox 5"/>
+          <p:cNvSpPr txBox="1"/>
+          <p:nvPr/>
+        </p:nvSpPr>
+        <p:spPr>
+          <a:xfrm>
+            <a:off x="73152" y="18288"/>
+            <a:ext cx="12042648" cy="274320"/>
+          </a:xfrm>
+          <a:prstGeom prst="rect">
+            <a:avLst/>
+          </a:prstGeom>
+          <a:noFill/>
+        </p:spPr>
+        <p:txBody>
+          <a:bodyPr wrap="none" lIns="36576" rIns="36576" tIns="0" bIns="0" anchor="ctr">
+            <a:spAutoFit/>
+          </a:bodyPr>
+          <a:lstStyle/>
+          <a:p>
+            <a:pPr algn="ctr"/>
+            <a:r>
+              <a:rPr sz="1000" b="1">
+                <a:solidFill>
+                  <a:srgbClr val="B91C1C"/>
+                </a:solidFill>
+                <a:latin typeface="Aptos"/>
+              </a:rPr>
+              <a:t>HISTORICAL DECK — superseded by the locked 2026-07-18 evidence; do not cite cross-split SOTA or universal KD claims</a:t>
+            </a:r>
+          </a:p>
+        </p:txBody>
+      </p:sp>
     </p:spTree>
   </p:cSld>
   <p:clrMapOvr>
@@ -5241,6 +5346,41 @@
           </a:p>
         </p:txBody>
       </p:sp>
+      <p:sp>
+        <p:nvSpPr>
+          <p:cNvPr id="12" name="TextBox 11"/>
+          <p:cNvSpPr txBox="1"/>
+          <p:nvPr/>
+        </p:nvSpPr>
+        <p:spPr>
+          <a:xfrm>
+            <a:off x="73152" y="18288"/>
+            <a:ext cx="12042648" cy="274320"/>
+          </a:xfrm>
+          <a:prstGeom prst="rect">
+            <a:avLst/>
+          </a:prstGeom>
+          <a:noFill/>
+        </p:spPr>
+        <p:txBody>
+          <a:bodyPr wrap="none" lIns="36576" rIns="36576" tIns="0" bIns="0" anchor="ctr">
+            <a:spAutoFit/>
+          </a:bodyPr>
+          <a:lstStyle/>
+          <a:p>
+            <a:pPr algn="ctr"/>
+            <a:r>
+              <a:rPr sz="1000" b="1">
+                <a:solidFill>
+                  <a:srgbClr val="B91C1C"/>
+                </a:solidFill>
+                <a:latin typeface="Aptos"/>
+              </a:rPr>
+              <a:t>HISTORICAL DECK — superseded by the locked 2026-07-18 evidence; do not cite cross-split SOTA or universal KD claims</a:t>
+            </a:r>
+          </a:p>
+        </p:txBody>
+      </p:sp>
     </p:spTree>
   </p:cSld>
   <p:clrMapOvr>
@@ -6017,6 +6157,41 @@
           </a:p>
         </p:txBody>
       </p:sp>
+      <p:sp>
+        <p:nvSpPr>
+          <p:cNvPr id="15" name="TextBox 14"/>
+          <p:cNvSpPr txBox="1"/>
+          <p:nvPr/>
+        </p:nvSpPr>
+        <p:spPr>
+          <a:xfrm>
+            <a:off x="73152" y="18288"/>
+            <a:ext cx="12042648" cy="274320"/>
+          </a:xfrm>
+          <a:prstGeom prst="rect">
+            <a:avLst/>
+          </a:prstGeom>
+          <a:noFill/>
+        </p:spPr>
+        <p:txBody>
+          <a:bodyPr wrap="none" lIns="36576" rIns="36576" tIns="0" bIns="0" anchor="ctr">
+            <a:spAutoFit/>
+          </a:bodyPr>
+          <a:lstStyle/>
+          <a:p>
+            <a:pPr algn="ctr"/>
+            <a:r>
+              <a:rPr sz="1000" b="1">
+                <a:solidFill>
+                  <a:srgbClr val="B91C1C"/>
+                </a:solidFill>
+                <a:latin typeface="Aptos"/>
+              </a:rPr>
+              <a:t>HISTORICAL DECK — superseded by the locked 2026-07-18 evidence; do not cite cross-split SOTA or universal KD claims</a:t>
+            </a:r>
+          </a:p>
+        </p:txBody>
+      </p:sp>
     </p:spTree>
   </p:cSld>
   <p:clrMapOvr>
@@ -6706,6 +6881,41 @@
           </a:p>
         </p:txBody>
       </p:sp>
+      <p:sp>
+        <p:nvSpPr>
+          <p:cNvPr id="15" name="TextBox 14"/>
+          <p:cNvSpPr txBox="1"/>
+          <p:nvPr/>
+        </p:nvSpPr>
+        <p:spPr>
+          <a:xfrm>
+            <a:off x="73152" y="18288"/>
+            <a:ext cx="12042648" cy="274320"/>
+          </a:xfrm>
+          <a:prstGeom prst="rect">
+            <a:avLst/>
+          </a:prstGeom>
+          <a:noFill/>
+        </p:spPr>
+        <p:txBody>
+          <a:bodyPr wrap="none" lIns="36576" rIns="36576" tIns="0" bIns="0" anchor="ctr">
+            <a:spAutoFit/>
+          </a:bodyPr>
+          <a:lstStyle/>
+          <a:p>
+            <a:pPr algn="ctr"/>
+            <a:r>
+              <a:rPr sz="1000" b="1">
+                <a:solidFill>
+                  <a:srgbClr val="B91C1C"/>
+                </a:solidFill>
+                <a:latin typeface="Aptos"/>
+              </a:rPr>
+              <a:t>HISTORICAL DECK — superseded by the locked 2026-07-18 evidence; do not cite cross-split SOTA or universal KD claims</a:t>
+            </a:r>
+          </a:p>
+        </p:txBody>
+      </p:sp>
     </p:spTree>
   </p:cSld>
   <p:clrMapOvr>
@@ -7357,6 +7567,41 @@
           </a:p>
         </p:txBody>
       </p:sp>
+      <p:sp>
+        <p:nvSpPr>
+          <p:cNvPr id="12" name="TextBox 11"/>
+          <p:cNvSpPr txBox="1"/>
+          <p:nvPr/>
+        </p:nvSpPr>
+        <p:spPr>
+          <a:xfrm>
+            <a:off x="73152" y="18288"/>
+            <a:ext cx="12042648" cy="274320"/>
+          </a:xfrm>
+          <a:prstGeom prst="rect">
+            <a:avLst/>
+          </a:prstGeom>
+          <a:noFill/>
+        </p:spPr>
+        <p:txBody>
+          <a:bodyPr wrap="none" lIns="36576" rIns="36576" tIns="0" bIns="0" anchor="ctr">
+            <a:spAutoFit/>
+          </a:bodyPr>
+          <a:lstStyle/>
+          <a:p>
+            <a:pPr algn="ctr"/>
+            <a:r>
+              <a:rPr sz="1000" b="1">
+                <a:solidFill>
+                  <a:srgbClr val="B91C1C"/>
+                </a:solidFill>
+                <a:latin typeface="Aptos"/>
+              </a:rPr>
+              <a:t>HISTORICAL DECK — superseded by the locked 2026-07-18 evidence; do not cite cross-split SOTA or universal KD claims</a:t>
+            </a:r>
+          </a:p>
+        </p:txBody>
+      </p:sp>
     </p:spTree>
   </p:cSld>
   <p:clrMapOvr>
@@ -8623,6 +8868,41 @@
           </a:p>
         </p:txBody>
       </p:sp>
+      <p:sp>
+        <p:nvSpPr>
+          <p:cNvPr id="29" name="TextBox 28"/>
+          <p:cNvSpPr txBox="1"/>
+          <p:nvPr/>
+        </p:nvSpPr>
+        <p:spPr>
+          <a:xfrm>
+            <a:off x="73152" y="18288"/>
+            <a:ext cx="12042648" cy="274320"/>
+          </a:xfrm>
+          <a:prstGeom prst="rect">
+            <a:avLst/>
+          </a:prstGeom>
+          <a:noFill/>
+        </p:spPr>
+        <p:txBody>
+          <a:bodyPr wrap="none" lIns="36576" rIns="36576" tIns="0" bIns="0" anchor="ctr">
+            <a:spAutoFit/>
+          </a:bodyPr>
+          <a:lstStyle/>
+          <a:p>
+            <a:pPr algn="ctr"/>
+            <a:r>
+              <a:rPr sz="1000" b="1">
+                <a:solidFill>
+                  <a:srgbClr val="B91C1C"/>
+                </a:solidFill>
+                <a:latin typeface="Aptos"/>
+              </a:rPr>
+              <a:t>HISTORICAL DECK — superseded by the locked 2026-07-18 evidence; do not cite cross-split SOTA or universal KD claims</a:t>
+            </a:r>
+          </a:p>
+        </p:txBody>
+      </p:sp>
     </p:spTree>
   </p:cSld>
   <p:clrMapOvr>
@@ -11839,6 +12119,41 @@
           </a:p>
         </p:txBody>
       </p:sp>
+      <p:sp>
+        <p:nvSpPr>
+          <p:cNvPr id="85" name="TextBox 84"/>
+          <p:cNvSpPr txBox="1"/>
+          <p:nvPr/>
+        </p:nvSpPr>
+        <p:spPr>
+          <a:xfrm>
+            <a:off x="73152" y="18288"/>
+            <a:ext cx="12042648" cy="274320"/>
+          </a:xfrm>
+          <a:prstGeom prst="rect">
+            <a:avLst/>
+          </a:prstGeom>
+          <a:noFill/>
+        </p:spPr>
+        <p:txBody>
+          <a:bodyPr wrap="none" lIns="36576" rIns="36576" tIns="0" bIns="0" anchor="ctr">
+            <a:spAutoFit/>
+          </a:bodyPr>
+          <a:lstStyle/>
+          <a:p>
+            <a:pPr algn="ctr"/>
+            <a:r>
+              <a:rPr sz="1000" b="1">
+                <a:solidFill>
+                  <a:srgbClr val="B91C1C"/>
+                </a:solidFill>
+                <a:latin typeface="Aptos"/>
+              </a:rPr>
+              <a:t>HISTORICAL DECK — superseded by the locked 2026-07-18 evidence; do not cite cross-split SOTA or universal KD claims</a:t>
+            </a:r>
+          </a:p>
+        </p:txBody>
+      </p:sp>
     </p:spTree>
   </p:cSld>
   <p:clrMapOvr>
@@ -14003,6 +14318,41 @@
           </a:p>
         </p:txBody>
       </p:sp>
+      <p:sp>
+        <p:nvSpPr>
+          <p:cNvPr id="56" name="TextBox 55"/>
+          <p:cNvSpPr txBox="1"/>
+          <p:nvPr/>
+        </p:nvSpPr>
+        <p:spPr>
+          <a:xfrm>
+            <a:off x="73152" y="18288"/>
+            <a:ext cx="12042648" cy="274320"/>
+          </a:xfrm>
+          <a:prstGeom prst="rect">
+            <a:avLst/>
+          </a:prstGeom>
+          <a:noFill/>
+        </p:spPr>
+        <p:txBody>
+          <a:bodyPr wrap="none" lIns="36576" rIns="36576" tIns="0" bIns="0" anchor="ctr">
+            <a:spAutoFit/>
+          </a:bodyPr>
+          <a:lstStyle/>
+          <a:p>
+            <a:pPr algn="ctr"/>
+            <a:r>
+              <a:rPr sz="1000" b="1">
+                <a:solidFill>
+                  <a:srgbClr val="B91C1C"/>
+                </a:solidFill>
+                <a:latin typeface="Aptos"/>
+              </a:rPr>
+              <a:t>HISTORICAL DECK — superseded by the locked 2026-07-18 evidence; do not cite cross-split SOTA or universal KD claims</a:t>
+            </a:r>
+          </a:p>
+        </p:txBody>
+      </p:sp>
     </p:spTree>
   </p:cSld>
   <p:clrMapOvr>
@@ -14693,6 +15043,41 @@
                 <a:latin typeface="Microsoft YaHei"/>
               </a:rPr>
               <a:t> 来的鲁棒。</a:t>
+            </a:r>
+          </a:p>
+        </p:txBody>
+      </p:sp>
+      <p:sp>
+        <p:nvSpPr>
+          <p:cNvPr id="17" name="TextBox 16"/>
+          <p:cNvSpPr txBox="1"/>
+          <p:nvPr/>
+        </p:nvSpPr>
+        <p:spPr>
+          <a:xfrm>
+            <a:off x="73152" y="18288"/>
+            <a:ext cx="12042648" cy="274320"/>
+          </a:xfrm>
+          <a:prstGeom prst="rect">
+            <a:avLst/>
+          </a:prstGeom>
+          <a:noFill/>
+        </p:spPr>
+        <p:txBody>
+          <a:bodyPr wrap="none" lIns="36576" rIns="36576" tIns="0" bIns="0" anchor="ctr">
+            <a:spAutoFit/>
+          </a:bodyPr>
+          <a:lstStyle/>
+          <a:p>
+            <a:pPr algn="ctr"/>
+            <a:r>
+              <a:rPr sz="1000" b="1">
+                <a:solidFill>
+                  <a:srgbClr val="B91C1C"/>
+                </a:solidFill>
+                <a:latin typeface="Aptos"/>
+              </a:rPr>
+              <a:t>HISTORICAL DECK — superseded by the locked 2026-07-18 evidence; do not cite cross-split SOTA or universal KD claims</a:t>
             </a:r>
           </a:p>
         </p:txBody>
